--- a/Presentation ASPNET - Part I.pptx
+++ b/Presentation ASPNET - Part I.pptx
@@ -14,7 +14,7 @@
     <p:sldId id="493" r:id="rId2"/>
     <p:sldId id="671" r:id="rId3"/>
     <p:sldId id="679" r:id="rId4"/>
-    <p:sldId id="674" r:id="rId5"/>
+    <p:sldId id="829" r:id="rId5"/>
     <p:sldId id="745" r:id="rId6"/>
     <p:sldId id="668" r:id="rId7"/>
     <p:sldId id="687" r:id="rId8"/>
@@ -183,7 +183,7 @@
             <p14:sldId id="493"/>
             <p14:sldId id="671"/>
             <p14:sldId id="679"/>
-            <p14:sldId id="674"/>
+            <p14:sldId id="829"/>
             <p14:sldId id="745"/>
             <p14:sldId id="668"/>
             <p14:sldId id="687"/>
@@ -381,7 +381,7 @@
           <a:p>
             <a:fld id="{CD54E0B9-A397-428E-BA01-CD7A34B572EB}" type="datetimeFigureOut">
               <a:rPr lang="en-US" smtClean="0"/>
-              <a:t>3/2/2025</a:t>
+              <a:t>2/21/2026</a:t>
             </a:fld>
             <a:endParaRPr lang="en-US"/>
           </a:p>
@@ -546,7 +546,7 @@
           <a:p>
             <a:fld id="{AA161301-18C9-4CA0-A0BF-791B6E0DDD4D}" type="datetimeFigureOut">
               <a:rPr lang="en-GB" smtClean="0"/>
-              <a:t>02/03/2025</a:t>
+              <a:t>21/02/2026</a:t>
             </a:fld>
             <a:endParaRPr lang="en-GB"/>
           </a:p>
@@ -17751,7 +17751,7 @@
         </p:nvSpPr>
         <p:spPr/>
         <p:txBody>
-          <a:bodyPr/>
+          <a:bodyPr anchor="ctr"/>
           <a:lstStyle/>
           <a:p>
             <a:pPr marL="355600" indent="-355600" algn="just">
@@ -17814,10 +17814,6 @@
               <a:t> process incoming requests, perform operations on the model and select views to render to the user.</a:t>
             </a:r>
             <a:endParaRPr lang="ro-RO" dirty="0"/>
-          </a:p>
-          <a:p>
-            <a:pPr algn="just"/>
-            <a:endParaRPr lang="en-US" dirty="0"/>
           </a:p>
         </p:txBody>
       </p:sp>
@@ -19806,11 +19802,11 @@
         <p:spPr>
           <a:xfrm>
             <a:off x="767408" y="1340768"/>
-            <a:ext cx="6192688" cy="4813995"/>
+            <a:ext cx="10009112" cy="4813995"/>
           </a:xfrm>
         </p:spPr>
         <p:txBody>
-          <a:bodyPr/>
+          <a:bodyPr anchor="ctr"/>
           <a:lstStyle/>
           <a:p>
             <a:pPr marL="342900" indent="-342900">
@@ -19818,8 +19814,8 @@
               <a:buChar char="§"/>
             </a:pPr>
             <a:r>
-              <a:rPr lang="en-US" b="1" dirty="0"/>
-              <a:t>Pro ASP.NET Core 3</a:t>
+              <a:rPr lang="en-US" dirty="0"/>
+              <a:t>Books</a:t>
             </a:r>
           </a:p>
           <a:p>
@@ -19829,7 +19825,17 @@
             </a:pPr>
             <a:r>
               <a:rPr lang="en-US" dirty="0"/>
-              <a:t>ADAM FREEMAN</a:t>
+              <a:t>ASP.NET CORE in Action, Third Edition (</a:t>
+            </a:r>
+            <a:r>
+              <a:rPr lang="en-US" u="sng" dirty="0">
+                <a:hlinkClick r:id="rId3"/>
+              </a:rPr>
+              <a:t>https://www.manning.com/books/asp-net-core-in-action-third-edition</a:t>
+            </a:r>
+            <a:r>
+              <a:rPr lang="en-US" dirty="0"/>
+              <a:t>)</a:t>
             </a:r>
           </a:p>
           <a:p>
@@ -19839,34 +19845,18 @@
             </a:pPr>
             <a:r>
               <a:rPr lang="en-US" dirty="0"/>
-              <a:t>Now in its 8th edition, the best-selling book on MVC is now updated for ASP.NET Core.</a:t>
-            </a:r>
-          </a:p>
-          <a:p>
-            <a:pPr marL="597150" lvl="1" indent="-342900">
-              <a:buFont typeface="Wingdings" panose="05000000000000000000" pitchFamily="2" charset="2"/>
-              <a:buChar char="§"/>
-            </a:pPr>
-            <a:r>
-              <a:rPr lang="en-US" dirty="0">
-                <a:hlinkClick r:id="rId3"/>
-              </a:rPr>
-              <a:t>https://www.apress.com/gp/book/9781484254394</a:t>
-            </a:r>
-            <a:endParaRPr lang="en-US" dirty="0"/>
-          </a:p>
-          <a:p>
-            <a:pPr marL="597150" lvl="1" indent="-342900">
-              <a:buFont typeface="Wingdings" panose="05000000000000000000" pitchFamily="2" charset="2"/>
-              <a:buChar char="§"/>
-            </a:pPr>
-            <a:r>
-              <a:rPr lang="en-US" dirty="0">
+              <a:t>Pro ASP.NET Core 7 (</a:t>
+            </a:r>
+            <a:r>
+              <a:rPr lang="en-US" u="sng" dirty="0">
                 <a:hlinkClick r:id="rId4"/>
               </a:rPr>
-              <a:t>https://github.com/Apress/pro-asp.net-core-3</a:t>
-            </a:r>
-            <a:endParaRPr lang="en-US" dirty="0"/>
+              <a:t>https://www.manning.com/books/pro-aspdotnet-core-7-tenth-edition</a:t>
+            </a:r>
+            <a:r>
+              <a:rPr lang="en-US" dirty="0"/>
+              <a:t>)</a:t>
+            </a:r>
           </a:p>
         </p:txBody>
       </p:sp>
@@ -19892,46 +19882,10 @@
           </a:p>
         </p:txBody>
       </p:sp>
-      <p:pic>
-        <p:nvPicPr>
-          <p:cNvPr id="6" name="Picture 5" descr="Logo&#10;&#10;Description automatically generated with low confidence">
-            <a:extLst>
-              <a:ext uri="{FF2B5EF4-FFF2-40B4-BE49-F238E27FC236}">
-                <a16:creationId xmlns:a16="http://schemas.microsoft.com/office/drawing/2014/main" id="{0F3DD0FD-3F60-4B52-98E7-47546BC390D4}"/>
-              </a:ext>
-            </a:extLst>
-          </p:cNvPr>
-          <p:cNvPicPr>
-            <a:picLocks noChangeAspect="1"/>
-          </p:cNvPicPr>
-          <p:nvPr/>
-        </p:nvPicPr>
-        <p:blipFill>
-          <a:blip r:embed="rId5" cstate="print">
-            <a:extLst>
-              <a:ext uri="{28A0092B-C50C-407E-A947-70E740481C1C}">
-                <a14:useLocalDpi xmlns:a14="http://schemas.microsoft.com/office/drawing/2010/main" val="0"/>
-              </a:ext>
-            </a:extLst>
-          </a:blip>
-          <a:stretch>
-            <a:fillRect/>
-          </a:stretch>
-        </p:blipFill>
-        <p:spPr>
-          <a:xfrm>
-            <a:off x="8040216" y="1556792"/>
-            <a:ext cx="3240360" cy="4306113"/>
-          </a:xfrm>
-          <a:prstGeom prst="rect">
-            <a:avLst/>
-          </a:prstGeom>
-        </p:spPr>
-      </p:pic>
     </p:spTree>
     <p:extLst>
       <p:ext uri="{BB962C8B-B14F-4D97-AF65-F5344CB8AC3E}">
-        <p14:creationId xmlns:p14="http://schemas.microsoft.com/office/powerpoint/2010/main" val="3064523811"/>
+        <p14:creationId xmlns:p14="http://schemas.microsoft.com/office/powerpoint/2010/main" val="930814865"/>
       </p:ext>
     </p:extLst>
   </p:cSld>
@@ -24522,33 +24476,8 @@
             </a:pPr>
             <a:r>
               <a:rPr lang="en-US" dirty="0"/>
-              <a:t>Free trial (10 days)</a:t>
-            </a:r>
-          </a:p>
-          <a:p>
-            <a:pPr marL="597150" lvl="1" indent="-342900" algn="just">
-              <a:buFont typeface="Wingdings" panose="05000000000000000000" pitchFamily="2" charset="2"/>
-              <a:buChar char="§"/>
-            </a:pPr>
-            <a:r>
-              <a:rPr lang="en-US" dirty="0"/>
-              <a:t>Free </a:t>
-            </a:r>
-            <a:r>
-              <a:rPr lang="en-US" b="1" dirty="0"/>
-              <a:t>limited</a:t>
-            </a:r>
-            <a:r>
-              <a:rPr lang="en-US" dirty="0"/>
-              <a:t> access through </a:t>
-            </a:r>
-            <a:r>
-              <a:rPr lang="en-US" dirty="0">
-                <a:hlinkClick r:id="rId4"/>
-              </a:rPr>
-              <a:t>https://azure.microsoft.com/en-us/free/students/</a:t>
-            </a:r>
-            <a:endParaRPr lang="en-US" dirty="0"/>
+              <a:t>Free trial</a:t>
+            </a:r>
           </a:p>
         </p:txBody>
       </p:sp>
